--- a/deck/AI_Cost_July_2026.pptx
+++ b/deck/AI_Cost_July_2026.pptx
@@ -6513,7 +6513,7 @@
         </p:nvSpPr>
         <p:spPr>
           <a:xfrm>
-            <a:off x="457200" y="3295026"/>
+            <a:off x="457200" y="3293502"/>
             <a:ext cx="2834640" cy="292608"/>
           </a:xfrm>
           <a:prstGeom prst="rect">
@@ -6552,7 +6552,7 @@
         </p:nvSpPr>
         <p:spPr>
           <a:xfrm>
-            <a:off x="3474720" y="3368178"/>
+            <a:off x="3474720" y="3366654"/>
             <a:ext cx="7071055" cy="146304"/>
           </a:xfrm>
           <a:prstGeom prst="roundRect">
@@ -6579,7 +6579,7 @@
         </p:nvSpPr>
         <p:spPr>
           <a:xfrm>
-            <a:off x="3474720" y="3368178"/>
+            <a:off x="3474720" y="3366654"/>
             <a:ext cx="5460435" cy="146304"/>
           </a:xfrm>
           <a:prstGeom prst="roundRect">
@@ -6606,7 +6606,7 @@
         </p:nvSpPr>
         <p:spPr>
           <a:xfrm>
-            <a:off x="10682935" y="3295026"/>
+            <a:off x="10682935" y="3293502"/>
             <a:ext cx="1051560" cy="292608"/>
           </a:xfrm>
           <a:prstGeom prst="rect">
@@ -6645,7 +6645,7 @@
         </p:nvSpPr>
         <p:spPr>
           <a:xfrm>
-            <a:off x="457200" y="3636539"/>
+            <a:off x="457200" y="3633491"/>
             <a:ext cx="2834640" cy="292608"/>
           </a:xfrm>
           <a:prstGeom prst="rect">
@@ -6684,7 +6684,7 @@
         </p:nvSpPr>
         <p:spPr>
           <a:xfrm>
-            <a:off x="3474720" y="3709691"/>
+            <a:off x="3474720" y="3706643"/>
             <a:ext cx="7071055" cy="146304"/>
           </a:xfrm>
           <a:prstGeom prst="roundRect">
@@ -6711,7 +6711,7 @@
         </p:nvSpPr>
         <p:spPr>
           <a:xfrm>
-            <a:off x="3474720" y="3709691"/>
+            <a:off x="3474720" y="3706643"/>
             <a:ext cx="2275304" cy="146304"/>
           </a:xfrm>
           <a:prstGeom prst="roundRect">
@@ -6738,7 +6738,7 @@
         </p:nvSpPr>
         <p:spPr>
           <a:xfrm>
-            <a:off x="10682935" y="3636539"/>
+            <a:off x="10682935" y="3633491"/>
             <a:ext cx="1051560" cy="292608"/>
           </a:xfrm>
           <a:prstGeom prst="rect">
@@ -6777,7 +6777,7 @@
         </p:nvSpPr>
         <p:spPr>
           <a:xfrm>
-            <a:off x="457200" y="3978053"/>
+            <a:off x="457200" y="3973481"/>
             <a:ext cx="2834640" cy="292608"/>
           </a:xfrm>
           <a:prstGeom prst="rect">
@@ -6816,7 +6816,7 @@
         </p:nvSpPr>
         <p:spPr>
           <a:xfrm>
-            <a:off x="3474720" y="4051205"/>
+            <a:off x="3474720" y="4046633"/>
             <a:ext cx="7071055" cy="146304"/>
           </a:xfrm>
           <a:prstGeom prst="roundRect">
@@ -6843,7 +6843,7 @@
         </p:nvSpPr>
         <p:spPr>
           <a:xfrm>
-            <a:off x="3474720" y="4051205"/>
+            <a:off x="3474720" y="4046633"/>
             <a:ext cx="1422681" cy="146304"/>
           </a:xfrm>
           <a:prstGeom prst="roundRect">
@@ -6870,7 +6870,7 @@
         </p:nvSpPr>
         <p:spPr>
           <a:xfrm>
-            <a:off x="10682935" y="3978053"/>
+            <a:off x="10682935" y="3973481"/>
             <a:ext cx="1051560" cy="292608"/>
           </a:xfrm>
           <a:prstGeom prst="rect">
@@ -6909,7 +6909,7 @@
         </p:nvSpPr>
         <p:spPr>
           <a:xfrm>
-            <a:off x="457200" y="4319566"/>
+            <a:off x="457200" y="4313470"/>
             <a:ext cx="2834640" cy="292608"/>
           </a:xfrm>
           <a:prstGeom prst="rect">
@@ -6948,7 +6948,7 @@
         </p:nvSpPr>
         <p:spPr>
           <a:xfrm>
-            <a:off x="3474720" y="4392718"/>
+            <a:off x="3474720" y="4386622"/>
             <a:ext cx="7071055" cy="146304"/>
           </a:xfrm>
           <a:prstGeom prst="roundRect">
@@ -6975,7 +6975,7 @@
         </p:nvSpPr>
         <p:spPr>
           <a:xfrm>
-            <a:off x="3474720" y="4392718"/>
+            <a:off x="3474720" y="4386622"/>
             <a:ext cx="672830" cy="146304"/>
           </a:xfrm>
           <a:prstGeom prst="roundRect">
@@ -7002,7 +7002,7 @@
         </p:nvSpPr>
         <p:spPr>
           <a:xfrm>
-            <a:off x="10682935" y="4319566"/>
+            <a:off x="10682935" y="4313470"/>
             <a:ext cx="1051560" cy="292608"/>
           </a:xfrm>
           <a:prstGeom prst="rect">
@@ -7041,7 +7041,7 @@
         </p:nvSpPr>
         <p:spPr>
           <a:xfrm>
-            <a:off x="457200" y="4661080"/>
+            <a:off x="457200" y="4653460"/>
             <a:ext cx="2834640" cy="292608"/>
           </a:xfrm>
           <a:prstGeom prst="rect">
@@ -7080,7 +7080,7 @@
         </p:nvSpPr>
         <p:spPr>
           <a:xfrm>
-            <a:off x="3474720" y="4734232"/>
+            <a:off x="3474720" y="4726612"/>
             <a:ext cx="7071055" cy="146304"/>
           </a:xfrm>
           <a:prstGeom prst="roundRect">
@@ -7107,7 +7107,7 @@
         </p:nvSpPr>
         <p:spPr>
           <a:xfrm>
-            <a:off x="3474720" y="4734232"/>
+            <a:off x="3474720" y="4726612"/>
             <a:ext cx="453773" cy="146304"/>
           </a:xfrm>
           <a:prstGeom prst="roundRect">
@@ -7134,7 +7134,7 @@
         </p:nvSpPr>
         <p:spPr>
           <a:xfrm>
-            <a:off x="10682935" y="4661080"/>
+            <a:off x="10682935" y="4653460"/>
             <a:ext cx="1051560" cy="292608"/>
           </a:xfrm>
           <a:prstGeom prst="rect">
@@ -7173,7 +7173,7 @@
         </p:nvSpPr>
         <p:spPr>
           <a:xfrm>
-            <a:off x="457200" y="5185474"/>
+            <a:off x="457200" y="5176330"/>
             <a:ext cx="11277295" cy="1041591"/>
           </a:xfrm>
           <a:prstGeom prst="roundRect">
@@ -7200,7 +7200,7 @@
         </p:nvSpPr>
         <p:spPr>
           <a:xfrm>
-            <a:off x="685800" y="5295202"/>
+            <a:off x="685800" y="5286058"/>
             <a:ext cx="10820095" cy="292608"/>
           </a:xfrm>
           <a:prstGeom prst="rect">
@@ -7239,7 +7239,7 @@
         </p:nvSpPr>
         <p:spPr>
           <a:xfrm>
-            <a:off x="685800" y="5624386"/>
+            <a:off x="685800" y="5615242"/>
             <a:ext cx="10820095" cy="474663"/>
           </a:xfrm>
           <a:prstGeom prst="rect">

--- a/deck/AI_Cost_July_2026.pptx
+++ b/deck/AI_Cost_July_2026.pptx
@@ -2447,7 +2447,7 @@
         <p:spPr>
           <a:xfrm>
             <a:off x="8321040" y="493776"/>
-            <a:ext cx="3413455" cy="658368"/>
+            <a:ext cx="3413455" cy="731520"/>
           </a:xfrm>
           <a:prstGeom prst="rect">
             <a:avLst/>
@@ -3480,7 +3480,7 @@
         <p:spPr>
           <a:xfrm>
             <a:off x="8321040" y="493776"/>
-            <a:ext cx="3413455" cy="658368"/>
+            <a:ext cx="3413455" cy="731520"/>
           </a:xfrm>
           <a:prstGeom prst="rect">
             <a:avLst/>
@@ -4220,7 +4220,7 @@
         <p:spPr>
           <a:xfrm>
             <a:off x="8321040" y="493776"/>
-            <a:ext cx="3413455" cy="658368"/>
+            <a:ext cx="3413455" cy="731520"/>
           </a:xfrm>
           <a:prstGeom prst="rect">
             <a:avLst/>
@@ -5971,7 +5971,7 @@
         <p:spPr>
           <a:xfrm>
             <a:off x="8321040" y="493776"/>
-            <a:ext cx="3413455" cy="658368"/>
+            <a:ext cx="3413455" cy="731520"/>
           </a:xfrm>
           <a:prstGeom prst="rect">
             <a:avLst/>
@@ -7442,7 +7442,7 @@
         <p:spPr>
           <a:xfrm>
             <a:off x="8321040" y="493776"/>
-            <a:ext cx="3413455" cy="658368"/>
+            <a:ext cx="3413455" cy="731520"/>
           </a:xfrm>
           <a:prstGeom prst="rect">
             <a:avLst/>
@@ -8182,7 +8182,7 @@
         <p:spPr>
           <a:xfrm>
             <a:off x="8321040" y="493776"/>
-            <a:ext cx="3413455" cy="658368"/>
+            <a:ext cx="3413455" cy="731520"/>
           </a:xfrm>
           <a:prstGeom prst="rect">
             <a:avLst/>
@@ -9057,7 +9057,7 @@
               <a:buNone/>
             </a:pPr>
             <a:r>
-              <a:rPr lang="en-US" sz="1600" dirty="0">
+              <a:rPr lang="en-US" sz="1200" dirty="0">
                 <a:solidFill>
                   <a:srgbClr val="91A0B7"/>
                 </a:solidFill>
@@ -9067,7 +9067,7 @@
               </a:rPr>
               <a:t>With an actuals column on every provider and a stated period, the export tells us what we spent, who spent it, and whether the estimate is holding, without anyone rebuilding the sheet.</a:t>
             </a:r>
-            <a:endParaRPr lang="en-US" sz="1600" dirty="0"/>
+            <a:endParaRPr lang="en-US" sz="1200" dirty="0"/>
           </a:p>
         </p:txBody>
       </p:sp>
